--- a/marketing/output/showcase/editable-chart.pptx
+++ b/marketing/output/showcase/editable-chart.pptx
@@ -640,7 +640,7 @@
         </p:grpSpPr>
         <p:sp>
           <p:nvSpPr>
-            <p:cNvPr id="2" name="logo-1"/>
+            <p:cNvPr id="2" name="logo-v"/>
             <p:cNvSpPr/>
             <p:nvPr/>
           </p:nvSpPr>
@@ -695,7 +695,7 @@
         </p:sp>
         <p:sp>
           <p:nvSpPr>
-            <p:cNvPr id="3" name="logo-2"/>
+            <p:cNvPr id="3" name="logo-i stem"/>
             <p:cNvSpPr/>
             <p:nvPr/>
           </p:nvSpPr>
@@ -741,7 +741,7 @@
         </p:sp>
         <p:sp>
           <p:nvSpPr>
-            <p:cNvPr id="4" name="logo-3"/>
+            <p:cNvPr id="4" name="logo-i dot"/>
             <p:cNvSpPr/>
             <p:nvPr/>
           </p:nvSpPr>
@@ -787,7 +787,7 @@
         </p:sp>
         <p:sp>
           <p:nvSpPr>
-            <p:cNvPr id="5" name="logo-4"/>
+            <p:cNvPr id="5" name="logo-x"/>
             <p:cNvSpPr/>
             <p:nvPr/>
           </p:nvSpPr>
@@ -842,7 +842,7 @@
         </p:sp>
         <p:sp>
           <p:nvSpPr>
-            <p:cNvPr id="6" name="logo-5"/>
+            <p:cNvPr id="6" name="logo-x reflection band 1"/>
             <p:cNvSpPr/>
             <p:nvPr/>
           </p:nvSpPr>
@@ -888,7 +888,7 @@
         </p:sp>
         <p:sp>
           <p:nvSpPr>
-            <p:cNvPr id="7" name="logo-6"/>
+            <p:cNvPr id="7" name="logo-x reflection band 2"/>
             <p:cNvSpPr/>
             <p:nvPr/>
           </p:nvSpPr>
@@ -934,7 +934,7 @@
         </p:sp>
         <p:sp>
           <p:nvSpPr>
-            <p:cNvPr id="8" name="logo-7"/>
+            <p:cNvPr id="8" name="logo-x reflection band 3"/>
             <p:cNvSpPr/>
             <p:nvPr/>
           </p:nvSpPr>
@@ -980,7 +980,7 @@
         </p:sp>
         <p:sp>
           <p:nvSpPr>
-            <p:cNvPr id="9" name="logo-8"/>
+            <p:cNvPr id="9" name="logo-x reflection band 4"/>
             <p:cNvSpPr/>
             <p:nvPr/>
           </p:nvSpPr>
@@ -1035,7 +1035,7 @@
         </p:sp>
         <p:sp>
           <p:nvSpPr>
-            <p:cNvPr id="10" name="logo-9"/>
+            <p:cNvPr id="10" name="logo-x reflection band 5"/>
             <p:cNvSpPr/>
             <p:nvPr/>
           </p:nvSpPr>
@@ -1093,7 +1093,7 @@
         </p:sp>
         <p:sp>
           <p:nvSpPr>
-            <p:cNvPr id="11" name="logo-10"/>
+            <p:cNvPr id="11" name="logo-x reflection band 6"/>
             <p:cNvSpPr/>
             <p:nvPr/>
           </p:nvSpPr>
@@ -1151,7 +1151,7 @@
         </p:sp>
         <p:sp>
           <p:nvSpPr>
-            <p:cNvPr id="12" name="logo-11"/>
+            <p:cNvPr id="12" name="logo-x reflection band 7"/>
             <p:cNvSpPr/>
             <p:nvPr/>
           </p:nvSpPr>
@@ -1209,7 +1209,7 @@
         </p:sp>
         <p:sp>
           <p:nvSpPr>
-            <p:cNvPr id="13" name="logo-12"/>
+            <p:cNvPr id="13" name="logo-l"/>
             <p:cNvSpPr/>
             <p:nvPr/>
           </p:nvSpPr>
@@ -1255,7 +1255,7 @@
         </p:sp>
         <p:sp>
           <p:nvSpPr>
-            <p:cNvPr id="14" name="logo-13"/>
+            <p:cNvPr id="14" name="logo-l reflection band 1"/>
             <p:cNvSpPr/>
             <p:nvPr/>
           </p:nvSpPr>
@@ -1301,7 +1301,7 @@
         </p:sp>
         <p:sp>
           <p:nvSpPr>
-            <p:cNvPr id="15" name="logo-14"/>
+            <p:cNvPr id="15" name="logo-l reflection band 2"/>
             <p:cNvSpPr/>
             <p:nvPr/>
           </p:nvSpPr>
@@ -1347,7 +1347,7 @@
         </p:sp>
         <p:sp>
           <p:nvSpPr>
-            <p:cNvPr id="16" name="logo-15"/>
+            <p:cNvPr id="16" name="logo-l reflection band 3"/>
             <p:cNvSpPr/>
             <p:nvPr/>
           </p:nvSpPr>
@@ -1393,7 +1393,7 @@
         </p:sp>
         <p:sp>
           <p:nvSpPr>
-            <p:cNvPr id="17" name="logo-16"/>
+            <p:cNvPr id="17" name="logo-l reflection band 4"/>
             <p:cNvSpPr/>
             <p:nvPr/>
           </p:nvSpPr>
@@ -1439,7 +1439,7 @@
         </p:sp>
         <p:sp>
           <p:nvSpPr>
-            <p:cNvPr id="18" name="logo-17"/>
+            <p:cNvPr id="18" name="logo-l reflection band 5"/>
             <p:cNvSpPr/>
             <p:nvPr/>
           </p:nvSpPr>
@@ -1485,7 +1485,7 @@
         </p:sp>
         <p:sp>
           <p:nvSpPr>
-            <p:cNvPr id="19" name="logo-18"/>
+            <p:cNvPr id="19" name="logo-l reflection band 6"/>
             <p:cNvSpPr/>
             <p:nvPr/>
           </p:nvSpPr>
@@ -1531,7 +1531,7 @@
         </p:sp>
         <p:sp>
           <p:nvSpPr>
-            <p:cNvPr id="20" name="logo-19"/>
+            <p:cNvPr id="20" name="logo-l reflection band 7"/>
             <p:cNvSpPr/>
             <p:nvPr/>
           </p:nvSpPr>
